--- a/content/seminars/ai-era-sales-power-over-features.pptx
+++ b/content/seminars/ai-era-sales-power-over-features.pptx
@@ -4317,7 +4317,7 @@
     <p:bg>
       <p:bgPr>
         <a:solidFill>
-          <a:srgbClr val="1A1A2E"/>
+          <a:srgbClr val="F5F0E8"/>
         </a:solidFill>
         <a:effectLst/>
       </p:bgPr>
@@ -4331,14 +4331,57 @@
       <p:grpSpPr/>
       <p:sp>
         <p:nvSpPr>
-          <p:cNvPr id="2" name="TextBox 1"/>
+          <p:cNvPr id="2" name="Rectangle 1"/>
+          <p:cNvSpPr/>
+          <p:nvPr/>
+        </p:nvSpPr>
+        <p:spPr>
+          <a:xfrm>
+            <a:off x="914400" y="914400"/>
+            <a:ext cx="10362895" cy="25400"/>
+          </a:xfrm>
+          <a:prstGeom prst="rect">
+            <a:avLst/>
+          </a:prstGeom>
+          <a:solidFill>
+            <a:srgbClr val="B8860B"/>
+          </a:solidFill>
+          <a:ln>
+            <a:noFill/>
+          </a:ln>
+        </p:spPr>
+        <p:style>
+          <a:lnRef idx="1">
+            <a:schemeClr val="accent1"/>
+          </a:lnRef>
+          <a:fillRef idx="3">
+            <a:schemeClr val="accent1"/>
+          </a:fillRef>
+          <a:effectRef idx="2">
+            <a:schemeClr val="accent1"/>
+          </a:effectRef>
+          <a:fontRef idx="minor">
+            <a:schemeClr val="lt1"/>
+          </a:fontRef>
+        </p:style>
+        <p:txBody>
+          <a:bodyPr rtlCol="0" anchor="ctr"/>
+          <a:lstStyle/>
+          <a:p>
+            <a:pPr algn="ctr"/>
+          </a:p>
+        </p:txBody>
+      </p:sp>
+      <p:sp>
+        <p:nvSpPr>
+          <p:cNvPr id="3" name="TextBox 2"/>
           <p:cNvSpPr txBox="1"/>
           <p:nvPr/>
         </p:nvSpPr>
         <p:spPr>
           <a:xfrm>
-            <a:off x="914400" y="1097280"/>
-            <a:ext cx="10058400" cy="1371600"/>
+            <a:off x="914400" y="1371600"/>
+            <a:ext cx="10362895" cy="1371600"/>
           </a:xfrm>
           <a:prstGeom prst="rect">
             <a:avLst/>
@@ -4352,9 +4395,9 @@
           <a:lstStyle/>
           <a:p>
             <a:pPr algn="ctr">
-              <a:defRPr sz="4400" b="1">
-                <a:solidFill>
-                  <a:srgbClr val="00D2FF"/>
+              <a:defRPr sz="4600" b="1">
+                <a:solidFill>
+                  <a:srgbClr val="3E2C1C"/>
                 </a:solidFill>
               </a:defRPr>
             </a:pPr>
@@ -4366,14 +4409,14 @@
       </p:sp>
       <p:sp>
         <p:nvSpPr>
-          <p:cNvPr id="3" name="TextBox 2"/>
+          <p:cNvPr id="4" name="TextBox 3"/>
           <p:cNvSpPr txBox="1"/>
           <p:nvPr/>
         </p:nvSpPr>
         <p:spPr>
           <a:xfrm>
-            <a:off x="1371600" y="2743200"/>
-            <a:ext cx="9144000" cy="1097280"/>
+            <a:off x="1371600" y="3017520"/>
+            <a:ext cx="9144000" cy="914400"/>
           </a:xfrm>
           <a:prstGeom prst="rect">
             <a:avLst/>
@@ -4389,7 +4432,7 @@
             <a:pPr algn="ctr">
               <a:defRPr sz="3000" b="0">
                 <a:solidFill>
-                  <a:srgbClr val="FFFFFF"/>
+                  <a:srgbClr val="B8860B"/>
                 </a:solidFill>
               </a:defRPr>
             </a:pPr>
@@ -4401,7 +4444,50 @@
       </p:sp>
       <p:sp>
         <p:nvSpPr>
-          <p:cNvPr id="4" name="TextBox 3"/>
+          <p:cNvPr id="5" name="Rectangle 4"/>
+          <p:cNvSpPr/>
+          <p:nvPr/>
+        </p:nvSpPr>
+        <p:spPr>
+          <a:xfrm>
+            <a:off x="914400" y="4572000"/>
+            <a:ext cx="10362895" cy="25400"/>
+          </a:xfrm>
+          <a:prstGeom prst="rect">
+            <a:avLst/>
+          </a:prstGeom>
+          <a:solidFill>
+            <a:srgbClr val="B8860B"/>
+          </a:solidFill>
+          <a:ln>
+            <a:noFill/>
+          </a:ln>
+        </p:spPr>
+        <p:style>
+          <a:lnRef idx="1">
+            <a:schemeClr val="accent1"/>
+          </a:lnRef>
+          <a:fillRef idx="3">
+            <a:schemeClr val="accent1"/>
+          </a:fillRef>
+          <a:effectRef idx="2">
+            <a:schemeClr val="accent1"/>
+          </a:effectRef>
+          <a:fontRef idx="minor">
+            <a:schemeClr val="lt1"/>
+          </a:fontRef>
+        </p:style>
+        <p:txBody>
+          <a:bodyPr rtlCol="0" anchor="ctr"/>
+          <a:lstStyle/>
+          <a:p>
+            <a:pPr algn="ctr"/>
+          </a:p>
+        </p:txBody>
+      </p:sp>
+      <p:sp>
+        <p:nvSpPr>
+          <p:cNvPr id="6" name="TextBox 5"/>
           <p:cNvSpPr txBox="1"/>
           <p:nvPr/>
         </p:nvSpPr>
@@ -4422,14 +4508,49 @@
           <a:lstStyle/>
           <a:p>
             <a:pPr algn="ctr">
-              <a:defRPr sz="2000" b="0">
-                <a:solidFill>
-                  <a:srgbClr val="CCCCCC"/>
+              <a:defRPr sz="2200" b="1">
+                <a:solidFill>
+                  <a:srgbClr val="B8860B"/>
                 </a:solidFill>
               </a:defRPr>
             </a:pPr>
             <a:r>
               <a:t>HARMONIC insight</a:t>
+            </a:r>
+          </a:p>
+        </p:txBody>
+      </p:sp>
+      <p:sp>
+        <p:nvSpPr>
+          <p:cNvPr id="7" name="TextBox 6"/>
+          <p:cNvSpPr txBox="1"/>
+          <p:nvPr/>
+        </p:nvSpPr>
+        <p:spPr>
+          <a:xfrm>
+            <a:off x="2743200" y="5669280"/>
+            <a:ext cx="6400800" cy="457200"/>
+          </a:xfrm>
+          <a:prstGeom prst="rect">
+            <a:avLst/>
+          </a:prstGeom>
+          <a:noFill/>
+        </p:spPr>
+        <p:txBody>
+          <a:bodyPr wrap="square">
+            <a:spAutoFit/>
+          </a:bodyPr>
+          <a:lstStyle/>
+          <a:p>
+            <a:pPr algn="ctr">
+              <a:defRPr sz="1600" b="0">
+                <a:solidFill>
+                  <a:srgbClr val="5A5A5A"/>
+                </a:solidFill>
+              </a:defRPr>
+            </a:pPr>
+            <a:r>
+              <a:t>AI で業務を、もっと確かに。</a:t>
             </a:r>
           </a:p>
         </p:txBody>
@@ -4448,7 +4569,7 @@
     <p:bg>
       <p:bgPr>
         <a:solidFill>
-          <a:srgbClr val="1A1A2E"/>
+          <a:srgbClr val="F5F0E8"/>
         </a:solidFill>
         <a:effectLst/>
       </p:bgPr>
@@ -4475,7 +4596,7 @@
             <a:avLst/>
           </a:prstGeom>
           <a:solidFill>
-            <a:srgbClr val="00D2FF"/>
+            <a:srgbClr val="B8860B"/>
           </a:solidFill>
           <a:ln>
             <a:noFill/>
@@ -4528,7 +4649,7 @@
             <a:pPr algn="l">
               <a:defRPr sz="3600" b="1">
                 <a:solidFill>
-                  <a:srgbClr val="FFFFFF"/>
+                  <a:srgbClr val="3E2C1C"/>
                 </a:solidFill>
               </a:defRPr>
             </a:pPr>
@@ -4540,7 +4661,50 @@
       </p:sp>
       <p:sp>
         <p:nvSpPr>
-          <p:cNvPr id="4" name="TextBox 3"/>
+          <p:cNvPr id="4" name="Rectangle 3"/>
+          <p:cNvSpPr/>
+          <p:nvPr/>
+        </p:nvSpPr>
+        <p:spPr>
+          <a:xfrm>
+            <a:off x="1097280" y="2011680"/>
+            <a:ext cx="5486400" cy="25400"/>
+          </a:xfrm>
+          <a:prstGeom prst="rect">
+            <a:avLst/>
+          </a:prstGeom>
+          <a:solidFill>
+            <a:srgbClr val="B8860B"/>
+          </a:solidFill>
+          <a:ln>
+            <a:noFill/>
+          </a:ln>
+        </p:spPr>
+        <p:style>
+          <a:lnRef idx="1">
+            <a:schemeClr val="accent1"/>
+          </a:lnRef>
+          <a:fillRef idx="3">
+            <a:schemeClr val="accent1"/>
+          </a:fillRef>
+          <a:effectRef idx="2">
+            <a:schemeClr val="accent1"/>
+          </a:effectRef>
+          <a:fontRef idx="minor">
+            <a:schemeClr val="lt1"/>
+          </a:fontRef>
+        </p:style>
+        <p:txBody>
+          <a:bodyPr rtlCol="0" anchor="ctr"/>
+          <a:lstStyle/>
+          <a:p>
+            <a:pPr algn="ctr"/>
+          </a:p>
+        </p:txBody>
+      </p:sp>
+      <p:sp>
+        <p:nvSpPr>
+          <p:cNvPr id="5" name="TextBox 4"/>
           <p:cNvSpPr txBox="1"/>
           <p:nvPr/>
         </p:nvSpPr>
@@ -4563,7 +4727,7 @@
             <a:pPr algn="l">
               <a:defRPr sz="2400" b="0">
                 <a:solidFill>
-                  <a:srgbClr val="FFFFFF"/>
+                  <a:srgbClr val="2C2C2C"/>
                 </a:solidFill>
               </a:defRPr>
             </a:pPr>
@@ -4575,7 +4739,7 @@
               </a:spcBef>
               <a:defRPr sz="2400" b="0">
                 <a:solidFill>
-                  <a:srgbClr val="CCCCCC"/>
+                  <a:srgbClr val="5A5A5A"/>
                 </a:solidFill>
               </a:defRPr>
             </a:pPr>
@@ -4590,7 +4754,7 @@
               </a:spcBef>
               <a:defRPr sz="2400" b="0">
                 <a:solidFill>
-                  <a:srgbClr val="CCCCCC"/>
+                  <a:srgbClr val="5A5A5A"/>
                 </a:solidFill>
               </a:defRPr>
             </a:pPr>
@@ -4605,7 +4769,7 @@
               </a:spcBef>
               <a:defRPr sz="2400" b="0">
                 <a:solidFill>
-                  <a:srgbClr val="CCCCCC"/>
+                  <a:srgbClr val="5A5A5A"/>
                 </a:solidFill>
               </a:defRPr>
             </a:pPr>
@@ -4617,7 +4781,7 @@
       </p:sp>
       <p:sp>
         <p:nvSpPr>
-          <p:cNvPr id="5" name="TextBox 4"/>
+          <p:cNvPr id="6" name="TextBox 5"/>
           <p:cNvSpPr txBox="1"/>
           <p:nvPr/>
         </p:nvSpPr>
@@ -4640,7 +4804,7 @@
             <a:pPr algn="l">
               <a:defRPr sz="2800" b="1">
                 <a:solidFill>
-                  <a:srgbClr val="FF6B6B"/>
+                  <a:srgbClr val="A03C3C"/>
                 </a:solidFill>
               </a:defRPr>
             </a:pPr>
@@ -4664,7 +4828,7 @@
     <p:bg>
       <p:bgPr>
         <a:solidFill>
-          <a:srgbClr val="1A1A2E"/>
+          <a:srgbClr val="F5F0E8"/>
         </a:solidFill>
         <a:effectLst/>
       </p:bgPr>
@@ -4691,7 +4855,7 @@
             <a:avLst/>
           </a:prstGeom>
           <a:solidFill>
-            <a:srgbClr val="00D2FF"/>
+            <a:srgbClr val="B8860B"/>
           </a:solidFill>
           <a:ln>
             <a:noFill/>
@@ -4744,7 +4908,7 @@
             <a:pPr algn="l">
               <a:defRPr sz="3400" b="1">
                 <a:solidFill>
-                  <a:srgbClr val="FFFFFF"/>
+                  <a:srgbClr val="3E2C1C"/>
                 </a:solidFill>
               </a:defRPr>
             </a:pPr>
@@ -4756,25 +4920,23 @@
       </p:sp>
       <p:sp>
         <p:nvSpPr>
-          <p:cNvPr id="4" name="Rounded Rectangle 3"/>
+          <p:cNvPr id="4" name="Rectangle 3"/>
           <p:cNvSpPr/>
           <p:nvPr/>
         </p:nvSpPr>
         <p:spPr>
           <a:xfrm>
-            <a:off x="1371600" y="2377440"/>
-            <a:ext cx="9144000" cy="822960"/>
-          </a:xfrm>
-          <a:prstGeom prst="roundRect">
+            <a:off x="1097280" y="2011680"/>
+            <a:ext cx="5486400" cy="25400"/>
+          </a:xfrm>
+          <a:prstGeom prst="rect">
             <a:avLst/>
           </a:prstGeom>
           <a:solidFill>
-            <a:srgbClr val="16213E"/>
+            <a:srgbClr val="B8860B"/>
           </a:solidFill>
-          <a:ln w="12700">
-            <a:solidFill>
-              <a:srgbClr val="00D2FF"/>
-            </a:solidFill>
+          <a:ln>
+            <a:noFill/>
           </a:ln>
         </p:spPr>
         <p:style>
@@ -4792,26 +4954,10 @@
           </a:fontRef>
         </p:style>
         <p:txBody>
-          <a:bodyPr rtlCol="0" anchor="ctr" wrap="square"/>
+          <a:bodyPr rtlCol="0" anchor="ctr"/>
           <a:lstStyle/>
           <a:p>
             <a:pPr algn="ctr"/>
-            <a:r>
-              <a:rPr sz="2200" b="1">
-                <a:solidFill>
-                  <a:srgbClr val="00D2FF"/>
-                </a:solidFill>
-              </a:rPr>
-              <a:t>① 競合調査    </a:t>
-            </a:r>
-            <a:r>
-              <a:rPr sz="2000">
-                <a:solidFill>
-                  <a:srgbClr val="CCCCCC"/>
-                </a:solidFill>
-              </a:rPr>
-              <a:t>AIで市場プレイヤーを洗い出し、機能比較表を自動生成</a:t>
-            </a:r>
           </a:p>
         </p:txBody>
       </p:sp>
@@ -4823,18 +4969,18 @@
         </p:nvSpPr>
         <p:spPr>
           <a:xfrm>
-            <a:off x="1371600" y="3337560"/>
+            <a:off x="1371600" y="2560320"/>
             <a:ext cx="9144000" cy="822960"/>
           </a:xfrm>
           <a:prstGeom prst="roundRect">
             <a:avLst/>
           </a:prstGeom>
           <a:solidFill>
-            <a:srgbClr val="16213E"/>
+            <a:srgbClr val="EEE8DD"/>
           </a:solidFill>
-          <a:ln w="12700">
+          <a:ln w="19050">
             <a:solidFill>
-              <a:srgbClr val="00D2FF"/>
+              <a:srgbClr val="D4A537"/>
             </a:solidFill>
           </a:ln>
         </p:spPr>
@@ -4860,18 +5006,18 @@
             <a:r>
               <a:rPr sz="2200" b="1">
                 <a:solidFill>
-                  <a:srgbClr val="00D2FF"/>
+                  <a:srgbClr val="B8860B"/>
                 </a:solidFill>
               </a:rPr>
-              <a:t>② 機能分析    </a:t>
+              <a:t>① 競合調査    </a:t>
             </a:r>
             <a:r>
               <a:rPr sz="2000">
                 <a:solidFill>
-                  <a:srgbClr val="CCCCCC"/>
+                  <a:srgbClr val="5A5A5A"/>
                 </a:solidFill>
               </a:rPr>
-              <a:t>競合アプリのUI/UX・データ構造・ロジックをAIが解析</a:t>
+              <a:t>AIで市場プレイヤーを洗い出し、機能比較表を自動生成</a:t>
             </a:r>
           </a:p>
         </p:txBody>
@@ -4884,18 +5030,18 @@
         </p:nvSpPr>
         <p:spPr>
           <a:xfrm>
-            <a:off x="1371600" y="4297680"/>
+            <a:off x="1371600" y="3520439"/>
             <a:ext cx="9144000" cy="822960"/>
           </a:xfrm>
           <a:prstGeom prst="roundRect">
             <a:avLst/>
           </a:prstGeom>
           <a:solidFill>
-            <a:srgbClr val="16213E"/>
+            <a:srgbClr val="EEE8DD"/>
           </a:solidFill>
-          <a:ln w="12700">
+          <a:ln w="19050">
             <a:solidFill>
-              <a:srgbClr val="00D2FF"/>
+              <a:srgbClr val="D4A537"/>
             </a:solidFill>
           </a:ln>
         </p:spPr>
@@ -4921,18 +5067,18 @@
             <a:r>
               <a:rPr sz="2200" b="1">
                 <a:solidFill>
-                  <a:srgbClr val="00D2FF"/>
+                  <a:srgbClr val="B8860B"/>
                 </a:solidFill>
               </a:rPr>
-              <a:t>③ 設計    </a:t>
+              <a:t>② 機能分析    </a:t>
             </a:r>
             <a:r>
               <a:rPr sz="2000">
                 <a:solidFill>
-                  <a:srgbClr val="CCCCCC"/>
+                  <a:srgbClr val="5A5A5A"/>
                 </a:solidFill>
               </a:rPr>
-              <a:t>アーキテクチャをAIが提案、設計書を自動作成</a:t>
+              <a:t>競合アプリのUI/UX・データ構造・ロジックをAIが解析</a:t>
             </a:r>
           </a:p>
         </p:txBody>
@@ -4945,18 +5091,18 @@
         </p:nvSpPr>
         <p:spPr>
           <a:xfrm>
-            <a:off x="1371600" y="5257800"/>
+            <a:off x="1371600" y="4480559"/>
             <a:ext cx="9144000" cy="822960"/>
           </a:xfrm>
           <a:prstGeom prst="roundRect">
             <a:avLst/>
           </a:prstGeom>
           <a:solidFill>
-            <a:srgbClr val="16213E"/>
+            <a:srgbClr val="EEE8DD"/>
           </a:solidFill>
-          <a:ln w="12700">
+          <a:ln w="19050">
             <a:solidFill>
-              <a:srgbClr val="00D2FF"/>
+              <a:srgbClr val="D4A537"/>
             </a:solidFill>
           </a:ln>
         </p:spPr>
@@ -4982,7 +5128,68 @@
             <a:r>
               <a:rPr sz="2200" b="1">
                 <a:solidFill>
-                  <a:srgbClr val="00D2FF"/>
+                  <a:srgbClr val="B8860B"/>
+                </a:solidFill>
+              </a:rPr>
+              <a:t>③ 設計    </a:t>
+            </a:r>
+            <a:r>
+              <a:rPr sz="2000">
+                <a:solidFill>
+                  <a:srgbClr val="5A5A5A"/>
+                </a:solidFill>
+              </a:rPr>
+              <a:t>アーキテクチャをAIが提案、設計書を自動作成</a:t>
+            </a:r>
+          </a:p>
+        </p:txBody>
+      </p:sp>
+      <p:sp>
+        <p:nvSpPr>
+          <p:cNvPr id="8" name="Rounded Rectangle 7"/>
+          <p:cNvSpPr/>
+          <p:nvPr/>
+        </p:nvSpPr>
+        <p:spPr>
+          <a:xfrm>
+            <a:off x="1371600" y="5440679"/>
+            <a:ext cx="9144000" cy="822960"/>
+          </a:xfrm>
+          <a:prstGeom prst="roundRect">
+            <a:avLst/>
+          </a:prstGeom>
+          <a:solidFill>
+            <a:srgbClr val="EEE8DD"/>
+          </a:solidFill>
+          <a:ln w="19050">
+            <a:solidFill>
+              <a:srgbClr val="D4A537"/>
+            </a:solidFill>
+          </a:ln>
+        </p:spPr>
+        <p:style>
+          <a:lnRef idx="1">
+            <a:schemeClr val="accent1"/>
+          </a:lnRef>
+          <a:fillRef idx="3">
+            <a:schemeClr val="accent1"/>
+          </a:fillRef>
+          <a:effectRef idx="2">
+            <a:schemeClr val="accent1"/>
+          </a:effectRef>
+          <a:fontRef idx="minor">
+            <a:schemeClr val="lt1"/>
+          </a:fontRef>
+        </p:style>
+        <p:txBody>
+          <a:bodyPr rtlCol="0" anchor="ctr" wrap="square"/>
+          <a:lstStyle/>
+          <a:p>
+            <a:pPr algn="ctr"/>
+            <a:r>
+              <a:rPr sz="2200" b="1">
+                <a:solidFill>
+                  <a:srgbClr val="B8860B"/>
                 </a:solidFill>
               </a:rPr>
               <a:t>④ 実装    </a:t>
@@ -4990,7 +5197,7 @@
             <a:r>
               <a:rPr sz="2000">
                 <a:solidFill>
-                  <a:srgbClr val="CCCCCC"/>
+                  <a:srgbClr val="5A5A5A"/>
                 </a:solidFill>
               </a:rPr>
               <a:t>コード生成・テスト・デバッグまでAIが伴走</a:t>
@@ -5012,7 +5219,7 @@
     <p:bg>
       <p:bgPr>
         <a:solidFill>
-          <a:srgbClr val="1A1A2E"/>
+          <a:srgbClr val="F5F0E8"/>
         </a:solidFill>
         <a:effectLst/>
       </p:bgPr>
@@ -5039,7 +5246,7 @@
             <a:avLst/>
           </a:prstGeom>
           <a:solidFill>
-            <a:srgbClr val="00D2FF"/>
+            <a:srgbClr val="B8860B"/>
           </a:solidFill>
           <a:ln>
             <a:noFill/>
@@ -5092,7 +5299,7 @@
             <a:pPr algn="l">
               <a:defRPr sz="3600" b="1">
                 <a:solidFill>
-                  <a:srgbClr val="FFFFFF"/>
+                  <a:srgbClr val="3E2C1C"/>
                 </a:solidFill>
               </a:defRPr>
             </a:pPr>
@@ -5104,60 +5311,23 @@
       </p:sp>
       <p:sp>
         <p:nvSpPr>
-          <p:cNvPr id="4" name="TextBox 3"/>
-          <p:cNvSpPr txBox="1"/>
+          <p:cNvPr id="4" name="Rectangle 3"/>
+          <p:cNvSpPr/>
           <p:nvPr/>
         </p:nvSpPr>
         <p:spPr>
           <a:xfrm>
-            <a:off x="1371600" y="2103120"/>
-            <a:ext cx="9144000" cy="548640"/>
+            <a:off x="1097280" y="2011680"/>
+            <a:ext cx="5486400" cy="25400"/>
           </a:xfrm>
           <a:prstGeom prst="rect">
             <a:avLst/>
           </a:prstGeom>
-          <a:noFill/>
-        </p:spPr>
-        <p:txBody>
-          <a:bodyPr wrap="square">
-            <a:spAutoFit/>
-          </a:bodyPr>
-          <a:lstStyle/>
-          <a:p>
-            <a:pPr algn="l">
-              <a:defRPr sz="2600" b="1">
-                <a:solidFill>
-                  <a:srgbClr val="00D2FF"/>
-                </a:solidFill>
-              </a:defRPr>
-            </a:pPr>
-            <a:r>
-              <a:t>AIが「調べる → 理解する → 作る」を圧縮した</a:t>
-            </a:r>
-          </a:p>
-        </p:txBody>
-      </p:sp>
-      <p:sp>
-        <p:nvSpPr>
-          <p:cNvPr id="5" name="Rounded Rectangle 4"/>
-          <p:cNvSpPr/>
-          <p:nvPr/>
-        </p:nvSpPr>
-        <p:spPr>
-          <a:xfrm>
-            <a:off x="1097280" y="2926080"/>
-            <a:ext cx="4754880" cy="3200400"/>
-          </a:xfrm>
-          <a:prstGeom prst="roundRect">
-            <a:avLst/>
-          </a:prstGeom>
           <a:solidFill>
-            <a:srgbClr val="16213E"/>
+            <a:srgbClr val="B8860B"/>
           </a:solidFill>
-          <a:ln w="25400">
-            <a:solidFill>
-              <a:srgbClr val="FF6B6B"/>
-            </a:solidFill>
+          <a:ln>
+            <a:noFill/>
           </a:ln>
         </p:spPr>
         <p:style>
@@ -5184,14 +5354,14 @@
       </p:sp>
       <p:sp>
         <p:nvSpPr>
-          <p:cNvPr id="6" name="TextBox 5"/>
+          <p:cNvPr id="5" name="TextBox 4"/>
           <p:cNvSpPr txBox="1"/>
           <p:nvPr/>
         </p:nvSpPr>
         <p:spPr>
           <a:xfrm>
-            <a:off x="1371600" y="2743200"/>
-            <a:ext cx="4114800" cy="457200"/>
+            <a:off x="1371600" y="2286000"/>
+            <a:ext cx="9144000" cy="548640"/>
           </a:xfrm>
           <a:prstGeom prst="rect">
             <a:avLst/>
@@ -5204,16 +5374,61 @@
           </a:bodyPr>
           <a:lstStyle/>
           <a:p>
-            <a:pPr algn="ctr">
-              <a:defRPr sz="2200" b="1">
-                <a:solidFill>
-                  <a:srgbClr val="FF6B6B"/>
+            <a:pPr algn="l">
+              <a:defRPr sz="2600" b="1">
+                <a:solidFill>
+                  <a:srgbClr val="B8860B"/>
                 </a:solidFill>
               </a:defRPr>
             </a:pPr>
             <a:r>
-              <a:t>従来</a:t>
-            </a:r>
+              <a:t>AIが「調べる → 理解する → 作る」を圧縮した</a:t>
+            </a:r>
+          </a:p>
+        </p:txBody>
+      </p:sp>
+      <p:sp>
+        <p:nvSpPr>
+          <p:cNvPr id="6" name="Rounded Rectangle 5"/>
+          <p:cNvSpPr/>
+          <p:nvPr/>
+        </p:nvSpPr>
+        <p:spPr>
+          <a:xfrm>
+            <a:off x="1097280" y="3108960"/>
+            <a:ext cx="4754880" cy="3017520"/>
+          </a:xfrm>
+          <a:prstGeom prst="roundRect">
+            <a:avLst/>
+          </a:prstGeom>
+          <a:solidFill>
+            <a:srgbClr val="EEE8DD"/>
+          </a:solidFill>
+          <a:ln w="25400">
+            <a:solidFill>
+              <a:srgbClr val="A03C3C"/>
+            </a:solidFill>
+          </a:ln>
+        </p:spPr>
+        <p:style>
+          <a:lnRef idx="1">
+            <a:schemeClr val="accent1"/>
+          </a:lnRef>
+          <a:fillRef idx="3">
+            <a:schemeClr val="accent1"/>
+          </a:fillRef>
+          <a:effectRef idx="2">
+            <a:schemeClr val="accent1"/>
+          </a:effectRef>
+          <a:fontRef idx="minor">
+            <a:schemeClr val="lt1"/>
+          </a:fontRef>
+        </p:style>
+        <p:txBody>
+          <a:bodyPr rtlCol="0" anchor="ctr"/>
+          <a:lstStyle/>
+          <a:p>
+            <a:pPr algn="ctr"/>
           </a:p>
         </p:txBody>
       </p:sp>
@@ -5225,8 +5440,8 @@
         </p:nvSpPr>
         <p:spPr>
           <a:xfrm>
-            <a:off x="1371600" y="3291840"/>
-            <a:ext cx="4389120" cy="2743200"/>
+            <a:off x="1371600" y="2926080"/>
+            <a:ext cx="4114800" cy="457200"/>
           </a:xfrm>
           <a:prstGeom prst="rect">
             <a:avLst/>
@@ -5239,10 +5454,45 @@
           </a:bodyPr>
           <a:lstStyle/>
           <a:p>
+            <a:pPr algn="ctr">
+              <a:defRPr sz="2200" b="1">
+                <a:solidFill>
+                  <a:srgbClr val="A03C3C"/>
+                </a:solidFill>
+              </a:defRPr>
+            </a:pPr>
+            <a:r>
+              <a:t>従来</a:t>
+            </a:r>
+          </a:p>
+        </p:txBody>
+      </p:sp>
+      <p:sp>
+        <p:nvSpPr>
+          <p:cNvPr id="8" name="TextBox 7"/>
+          <p:cNvSpPr txBox="1"/>
+          <p:nvPr/>
+        </p:nvSpPr>
+        <p:spPr>
+          <a:xfrm>
+            <a:off x="1371600" y="3474720"/>
+            <a:ext cx="4389120" cy="2743200"/>
+          </a:xfrm>
+          <a:prstGeom prst="rect">
+            <a:avLst/>
+          </a:prstGeom>
+          <a:noFill/>
+        </p:spPr>
+        <p:txBody>
+          <a:bodyPr wrap="square">
+            <a:spAutoFit/>
+          </a:bodyPr>
+          <a:lstStyle/>
+          <a:p>
             <a:pPr algn="l">
               <a:defRPr sz="2000" b="0">
                 <a:solidFill>
-                  <a:srgbClr val="FFFFFF"/>
+                  <a:srgbClr val="2C2C2C"/>
                 </a:solidFill>
               </a:defRPr>
             </a:pPr>
@@ -5254,7 +5504,7 @@
               </a:spcBef>
               <a:defRPr sz="2000" b="0">
                 <a:solidFill>
-                  <a:srgbClr val="CCCCCC"/>
+                  <a:srgbClr val="5A5A5A"/>
                 </a:solidFill>
               </a:defRPr>
             </a:pPr>
@@ -5269,7 +5519,7 @@
               </a:spcBef>
               <a:defRPr sz="2000" b="0">
                 <a:solidFill>
-                  <a:srgbClr val="CCCCCC"/>
+                  <a:srgbClr val="5A5A5A"/>
                 </a:solidFill>
               </a:defRPr>
             </a:pPr>
@@ -5284,7 +5534,7 @@
               </a:spcBef>
               <a:defRPr sz="2000" b="0">
                 <a:solidFill>
-                  <a:srgbClr val="CCCCCC"/>
+                  <a:srgbClr val="5A5A5A"/>
                 </a:solidFill>
               </a:defRPr>
             </a:pPr>
@@ -5299,7 +5549,7 @@
               </a:spcBef>
               <a:defRPr sz="2000" b="0">
                 <a:solidFill>
-                  <a:srgbClr val="CCCCCC"/>
+                  <a:srgbClr val="5A5A5A"/>
                 </a:solidFill>
               </a:defRPr>
             </a:pPr>
@@ -5311,24 +5561,24 @@
       </p:sp>
       <p:sp>
         <p:nvSpPr>
-          <p:cNvPr id="8" name="Rounded Rectangle 7"/>
+          <p:cNvPr id="9" name="Rounded Rectangle 8"/>
           <p:cNvSpPr/>
           <p:nvPr/>
         </p:nvSpPr>
         <p:spPr>
           <a:xfrm>
-            <a:off x="6400800" y="2926080"/>
-            <a:ext cx="4754880" cy="3200400"/>
+            <a:off x="6400800" y="3108960"/>
+            <a:ext cx="4754880" cy="3017520"/>
           </a:xfrm>
           <a:prstGeom prst="roundRect">
             <a:avLst/>
           </a:prstGeom>
           <a:solidFill>
-            <a:srgbClr val="16213E"/>
+            <a:srgbClr val="EEE8DD"/>
           </a:solidFill>
           <a:ln w="25400">
             <a:solidFill>
-              <a:srgbClr val="00D2FF"/>
+              <a:srgbClr val="B8860B"/>
             </a:solidFill>
           </a:ln>
         </p:spPr>
@@ -5356,13 +5606,13 @@
       </p:sp>
       <p:sp>
         <p:nvSpPr>
-          <p:cNvPr id="9" name="TextBox 8"/>
+          <p:cNvPr id="10" name="TextBox 9"/>
           <p:cNvSpPr txBox="1"/>
           <p:nvPr/>
         </p:nvSpPr>
         <p:spPr>
           <a:xfrm>
-            <a:off x="6675120" y="2743200"/>
+            <a:off x="6675120" y="2926080"/>
             <a:ext cx="4114800" cy="457200"/>
           </a:xfrm>
           <a:prstGeom prst="rect">
@@ -5379,7 +5629,7 @@
             <a:pPr algn="ctr">
               <a:defRPr sz="2200" b="1">
                 <a:solidFill>
-                  <a:srgbClr val="00D2FF"/>
+                  <a:srgbClr val="B8860B"/>
                 </a:solidFill>
               </a:defRPr>
             </a:pPr>
@@ -5391,13 +5641,13 @@
       </p:sp>
       <p:sp>
         <p:nvSpPr>
-          <p:cNvPr id="10" name="TextBox 9"/>
+          <p:cNvPr id="11" name="TextBox 10"/>
           <p:cNvSpPr txBox="1"/>
           <p:nvPr/>
         </p:nvSpPr>
         <p:spPr>
           <a:xfrm>
-            <a:off x="6675120" y="3291840"/>
+            <a:off x="6675120" y="3474720"/>
             <a:ext cx="4389120" cy="2743200"/>
           </a:xfrm>
           <a:prstGeom prst="rect">
@@ -5414,7 +5664,7 @@
             <a:pPr algn="l">
               <a:defRPr sz="2000" b="0">
                 <a:solidFill>
-                  <a:srgbClr val="FFFFFF"/>
+                  <a:srgbClr val="2C2C2C"/>
                 </a:solidFill>
               </a:defRPr>
             </a:pPr>
@@ -5426,7 +5676,7 @@
               </a:spcBef>
               <a:defRPr sz="2000" b="0">
                 <a:solidFill>
-                  <a:srgbClr val="00D2FF"/>
+                  <a:srgbClr val="B8860B"/>
                 </a:solidFill>
               </a:defRPr>
             </a:pPr>
@@ -5441,7 +5691,7 @@
               </a:spcBef>
               <a:defRPr sz="2000" b="0">
                 <a:solidFill>
-                  <a:srgbClr val="00D2FF"/>
+                  <a:srgbClr val="B8860B"/>
                 </a:solidFill>
               </a:defRPr>
             </a:pPr>
@@ -5456,7 +5706,7 @@
               </a:spcBef>
               <a:defRPr sz="2000" b="0">
                 <a:solidFill>
-                  <a:srgbClr val="00D2FF"/>
+                  <a:srgbClr val="B8860B"/>
                 </a:solidFill>
               </a:defRPr>
             </a:pPr>
@@ -5468,13 +5718,13 @@
       </p:sp>
       <p:sp>
         <p:nvSpPr>
-          <p:cNvPr id="11" name="TextBox 10"/>
+          <p:cNvPr id="12" name="TextBox 11"/>
           <p:cNvSpPr txBox="1"/>
           <p:nvPr/>
         </p:nvSpPr>
         <p:spPr>
           <a:xfrm>
-            <a:off x="5303520" y="4114800"/>
+            <a:off x="5303520" y="4297680"/>
             <a:ext cx="1371600" cy="731520"/>
           </a:xfrm>
           <a:prstGeom prst="rect">
@@ -5491,7 +5741,7 @@
             <a:pPr algn="ctr">
               <a:defRPr sz="4800" b="1">
                 <a:solidFill>
-                  <a:srgbClr val="FFA500"/>
+                  <a:srgbClr val="B8860B"/>
                 </a:solidFill>
               </a:defRPr>
             </a:pPr>
@@ -5515,7 +5765,7 @@
     <p:bg>
       <p:bgPr>
         <a:solidFill>
-          <a:srgbClr val="1A1A2E"/>
+          <a:srgbClr val="F5F0E8"/>
         </a:solidFill>
         <a:effectLst/>
       </p:bgPr>
@@ -5542,7 +5792,7 @@
             <a:avLst/>
           </a:prstGeom>
           <a:solidFill>
-            <a:srgbClr val="00D2FF"/>
+            <a:srgbClr val="B8860B"/>
           </a:solidFill>
           <a:ln>
             <a:noFill/>
@@ -5595,7 +5845,7 @@
             <a:pPr algn="l">
               <a:defRPr sz="3600" b="1">
                 <a:solidFill>
-                  <a:srgbClr val="FFFFFF"/>
+                  <a:srgbClr val="3E2C1C"/>
                 </a:solidFill>
               </a:defRPr>
             </a:pPr>
@@ -5605,16 +5855,59 @@
           </a:p>
         </p:txBody>
       </p:sp>
+      <p:sp>
+        <p:nvSpPr>
+          <p:cNvPr id="4" name="Rectangle 3"/>
+          <p:cNvSpPr/>
+          <p:nvPr/>
+        </p:nvSpPr>
+        <p:spPr>
+          <a:xfrm>
+            <a:off x="1097280" y="2011680"/>
+            <a:ext cx="5486400" cy="25400"/>
+          </a:xfrm>
+          <a:prstGeom prst="rect">
+            <a:avLst/>
+          </a:prstGeom>
+          <a:solidFill>
+            <a:srgbClr val="B8860B"/>
+          </a:solidFill>
+          <a:ln>
+            <a:noFill/>
+          </a:ln>
+        </p:spPr>
+        <p:style>
+          <a:lnRef idx="1">
+            <a:schemeClr val="accent1"/>
+          </a:lnRef>
+          <a:fillRef idx="3">
+            <a:schemeClr val="accent1"/>
+          </a:fillRef>
+          <a:effectRef idx="2">
+            <a:schemeClr val="accent1"/>
+          </a:effectRef>
+          <a:fontRef idx="minor">
+            <a:schemeClr val="lt1"/>
+          </a:fontRef>
+        </p:style>
+        <p:txBody>
+          <a:bodyPr rtlCol="0" anchor="ctr"/>
+          <a:lstStyle/>
+          <a:p>
+            <a:pPr algn="ctr"/>
+          </a:p>
+        </p:txBody>
+      </p:sp>
       <p:graphicFrame>
         <p:nvGraphicFramePr>
-          <p:cNvPr id="4" name="Table 3"/>
+          <p:cNvPr id="5" name="Table 4"/>
           <p:cNvGraphicFramePr>
             <a:graphicFrameLocks noGrp="1"/>
           </p:cNvGraphicFramePr>
           <p:nvPr/>
         </p:nvGraphicFramePr>
         <p:xfrm>
-          <a:off x="1371600" y="2286000"/>
+          <a:off x="1371600" y="2560320"/>
           <a:ext cx="9144000" cy="3200400"/>
         </p:xfrm>
         <a:graphic>
@@ -5636,7 +5929,7 @@
                       <a:pPr>
                         <a:defRPr sz="2000" b="1">
                           <a:solidFill>
-                            <a:srgbClr val="1A1A2E"/>
+                            <a:srgbClr val="FFFFFF"/>
                           </a:solidFill>
                         </a:defRPr>
                       </a:pPr>
@@ -5647,7 +5940,7 @@
                   </a:txBody>
                   <a:tcPr>
                     <a:solidFill>
-                      <a:srgbClr val="00D2FF"/>
+                      <a:srgbClr val="B8860B"/>
                     </a:solidFill>
                   </a:tcPr>
                 </a:tc>
@@ -5659,7 +5952,7 @@
                       <a:pPr>
                         <a:defRPr sz="2000" b="1">
                           <a:solidFill>
-                            <a:srgbClr val="1A1A2E"/>
+                            <a:srgbClr val="FFFFFF"/>
                           </a:solidFill>
                         </a:defRPr>
                       </a:pPr>
@@ -5670,7 +5963,7 @@
                   </a:txBody>
                   <a:tcPr>
                     <a:solidFill>
-                      <a:srgbClr val="00D2FF"/>
+                      <a:srgbClr val="B8860B"/>
                     </a:solidFill>
                   </a:tcPr>
                 </a:tc>
@@ -5684,7 +5977,7 @@
                       <a:pPr>
                         <a:defRPr sz="2000">
                           <a:solidFill>
-                            <a:srgbClr val="FFFFFF"/>
+                            <a:srgbClr val="2C2C2C"/>
                           </a:solidFill>
                         </a:defRPr>
                       </a:pPr>
@@ -5695,7 +5988,7 @@
                   </a:txBody>
                   <a:tcPr>
                     <a:solidFill>
-                      <a:srgbClr val="16213E"/>
+                      <a:srgbClr val="EEE8DD"/>
                     </a:solidFill>
                   </a:tcPr>
                 </a:tc>
@@ -5707,7 +6000,7 @@
                       <a:pPr>
                         <a:defRPr sz="2000">
                           <a:solidFill>
-                            <a:srgbClr val="FF6B6B"/>
+                            <a:srgbClr val="A03C3C"/>
                           </a:solidFill>
                         </a:defRPr>
                       </a:pPr>
@@ -5718,7 +6011,7 @@
                   </a:txBody>
                   <a:tcPr>
                     <a:solidFill>
-                      <a:srgbClr val="16213E"/>
+                      <a:srgbClr val="EEE8DD"/>
                     </a:solidFill>
                   </a:tcPr>
                 </a:tc>
@@ -5732,7 +6025,7 @@
                       <a:pPr>
                         <a:defRPr sz="2000">
                           <a:solidFill>
-                            <a:srgbClr val="FFFFFF"/>
+                            <a:srgbClr val="2C2C2C"/>
                           </a:solidFill>
                         </a:defRPr>
                       </a:pPr>
@@ -5743,7 +6036,7 @@
                   </a:txBody>
                   <a:tcPr>
                     <a:solidFill>
-                      <a:srgbClr val="16213E"/>
+                      <a:srgbClr val="F5F0E8"/>
                     </a:solidFill>
                   </a:tcPr>
                 </a:tc>
@@ -5755,7 +6048,7 @@
                       <a:pPr>
                         <a:defRPr sz="2000">
                           <a:solidFill>
-                            <a:srgbClr val="FF6B6B"/>
+                            <a:srgbClr val="A03C3C"/>
                           </a:solidFill>
                         </a:defRPr>
                       </a:pPr>
@@ -5766,7 +6059,7 @@
                   </a:txBody>
                   <a:tcPr>
                     <a:solidFill>
-                      <a:srgbClr val="16213E"/>
+                      <a:srgbClr val="F5F0E8"/>
                     </a:solidFill>
                   </a:tcPr>
                 </a:tc>
@@ -5780,7 +6073,7 @@
                       <a:pPr>
                         <a:defRPr sz="2000">
                           <a:solidFill>
-                            <a:srgbClr val="FFFFFF"/>
+                            <a:srgbClr val="2C2C2C"/>
                           </a:solidFill>
                         </a:defRPr>
                       </a:pPr>
@@ -5791,7 +6084,7 @@
                   </a:txBody>
                   <a:tcPr>
                     <a:solidFill>
-                      <a:srgbClr val="16213E"/>
+                      <a:srgbClr val="EEE8DD"/>
                     </a:solidFill>
                   </a:tcPr>
                 </a:tc>
@@ -5803,7 +6096,7 @@
                       <a:pPr>
                         <a:defRPr sz="2000">
                           <a:solidFill>
-                            <a:srgbClr val="FF6B6B"/>
+                            <a:srgbClr val="A03C3C"/>
                           </a:solidFill>
                         </a:defRPr>
                       </a:pPr>
@@ -5814,7 +6107,7 @@
                   </a:txBody>
                   <a:tcPr>
                     <a:solidFill>
-                      <a:srgbClr val="16213E"/>
+                      <a:srgbClr val="EEE8DD"/>
                     </a:solidFill>
                   </a:tcPr>
                 </a:tc>
@@ -5828,7 +6121,7 @@
                       <a:pPr>
                         <a:defRPr sz="2000">
                           <a:solidFill>
-                            <a:srgbClr val="FFFFFF"/>
+                            <a:srgbClr val="2C2C2C"/>
                           </a:solidFill>
                         </a:defRPr>
                       </a:pPr>
@@ -5839,7 +6132,7 @@
                   </a:txBody>
                   <a:tcPr>
                     <a:solidFill>
-                      <a:srgbClr val="16213E"/>
+                      <a:srgbClr val="F5F0E8"/>
                     </a:solidFill>
                   </a:tcPr>
                 </a:tc>
@@ -5851,7 +6144,7 @@
                       <a:pPr>
                         <a:defRPr sz="2000">
                           <a:solidFill>
-                            <a:srgbClr val="FF6B6B"/>
+                            <a:srgbClr val="A03C3C"/>
                           </a:solidFill>
                         </a:defRPr>
                       </a:pPr>
@@ -5862,7 +6155,7 @@
                   </a:txBody>
                   <a:tcPr>
                     <a:solidFill>
-                      <a:srgbClr val="16213E"/>
+                      <a:srgbClr val="F5F0E8"/>
                     </a:solidFill>
                   </a:tcPr>
                 </a:tc>
@@ -5885,7 +6178,7 @@
     <p:bg>
       <p:bgPr>
         <a:solidFill>
-          <a:srgbClr val="1A1A2E"/>
+          <a:srgbClr val="F5F0E8"/>
         </a:solidFill>
         <a:effectLst/>
       </p:bgPr>
@@ -5912,7 +6205,7 @@
             <a:avLst/>
           </a:prstGeom>
           <a:solidFill>
-            <a:srgbClr val="00D2FF"/>
+            <a:srgbClr val="B8860B"/>
           </a:solidFill>
           <a:ln>
             <a:noFill/>
@@ -5965,7 +6258,7 @@
             <a:pPr algn="l">
               <a:defRPr sz="3600" b="1">
                 <a:solidFill>
-                  <a:srgbClr val="FFFFFF"/>
+                  <a:srgbClr val="3E2C1C"/>
                 </a:solidFill>
               </a:defRPr>
             </a:pPr>
@@ -5977,55 +6270,20 @@
       </p:sp>
       <p:sp>
         <p:nvSpPr>
-          <p:cNvPr id="4" name="TextBox 3"/>
-          <p:cNvSpPr txBox="1"/>
-          <p:nvPr/>
-        </p:nvSpPr>
-        <p:spPr>
-          <a:xfrm>
-            <a:off x="1371600" y="2011680"/>
-            <a:ext cx="9144000" cy="548640"/>
-          </a:xfrm>
-          <a:prstGeom prst="rect">
-            <a:avLst/>
-          </a:prstGeom>
-          <a:noFill/>
-        </p:spPr>
-        <p:txBody>
-          <a:bodyPr wrap="square">
-            <a:spAutoFit/>
-          </a:bodyPr>
-          <a:lstStyle/>
-          <a:p>
-            <a:pPr algn="l">
-              <a:defRPr sz="2400" b="1">
-                <a:solidFill>
-                  <a:srgbClr val="00D2FF"/>
-                </a:solidFill>
-              </a:defRPr>
-            </a:pPr>
-            <a:r>
-              <a:t>「作れる」と「売れる」は全く別のスキルセット</a:t>
-            </a:r>
-          </a:p>
-        </p:txBody>
-      </p:sp>
-      <p:sp>
-        <p:nvSpPr>
-          <p:cNvPr id="5" name="Rectangle 4"/>
+          <p:cNvPr id="4" name="Rectangle 3"/>
           <p:cNvSpPr/>
           <p:nvPr/>
         </p:nvSpPr>
         <p:spPr>
           <a:xfrm>
-            <a:off x="1371600" y="2834640"/>
-            <a:ext cx="54864" cy="594360"/>
+            <a:off x="1097280" y="2011680"/>
+            <a:ext cx="5486400" cy="25400"/>
           </a:xfrm>
           <a:prstGeom prst="rect">
             <a:avLst/>
           </a:prstGeom>
           <a:solidFill>
-            <a:srgbClr val="00D2FF"/>
+            <a:srgbClr val="B8860B"/>
           </a:solidFill>
           <a:ln>
             <a:noFill/>
@@ -6055,14 +6313,14 @@
       </p:sp>
       <p:sp>
         <p:nvSpPr>
-          <p:cNvPr id="6" name="TextBox 5"/>
+          <p:cNvPr id="5" name="TextBox 4"/>
           <p:cNvSpPr txBox="1"/>
           <p:nvPr/>
         </p:nvSpPr>
         <p:spPr>
           <a:xfrm>
-            <a:off x="1737360" y="2834640"/>
-            <a:ext cx="2743200" cy="594360"/>
+            <a:off x="1371600" y="2286000"/>
+            <a:ext cx="9144000" cy="548640"/>
           </a:xfrm>
           <a:prstGeom prst="rect">
             <a:avLst/>
@@ -6076,69 +6334,34 @@
           <a:lstStyle/>
           <a:p>
             <a:pPr algn="l">
-              <a:defRPr sz="2200" b="1">
-                <a:solidFill>
-                  <a:srgbClr val="00D2FF"/>
+              <a:defRPr sz="2400" b="1">
+                <a:solidFill>
+                  <a:srgbClr val="B8860B"/>
                 </a:solidFill>
               </a:defRPr>
             </a:pPr>
             <a:r>
-              <a:t>顧客との信頼関係</a:t>
-            </a:r>
-          </a:p>
-        </p:txBody>
-      </p:sp>
-      <p:sp>
-        <p:nvSpPr>
-          <p:cNvPr id="7" name="TextBox 6"/>
-          <p:cNvSpPr txBox="1"/>
-          <p:nvPr/>
-        </p:nvSpPr>
-        <p:spPr>
-          <a:xfrm>
-            <a:off x="5029200" y="2834640"/>
-            <a:ext cx="6400800" cy="594360"/>
-          </a:xfrm>
-          <a:prstGeom prst="rect">
-            <a:avLst/>
-          </a:prstGeom>
-          <a:noFill/>
-        </p:spPr>
-        <p:txBody>
-          <a:bodyPr wrap="square">
-            <a:spAutoFit/>
-          </a:bodyPr>
-          <a:lstStyle/>
-          <a:p>
-            <a:pPr algn="l">
-              <a:defRPr sz="2000" b="0">
-                <a:solidFill>
-                  <a:srgbClr val="CCCCCC"/>
-                </a:solidFill>
-              </a:defRPr>
-            </a:pPr>
-            <a:r>
-              <a:t>「この人から買いたい」と思われる力</a:t>
-            </a:r>
-          </a:p>
-        </p:txBody>
-      </p:sp>
-      <p:sp>
-        <p:nvSpPr>
-          <p:cNvPr id="8" name="Rectangle 7"/>
+              <a:t>「作れる」と「売れる」は全く別のスキルセット</a:t>
+            </a:r>
+          </a:p>
+        </p:txBody>
+      </p:sp>
+      <p:sp>
+        <p:nvSpPr>
+          <p:cNvPr id="6" name="Rectangle 5"/>
           <p:cNvSpPr/>
           <p:nvPr/>
         </p:nvSpPr>
         <p:spPr>
           <a:xfrm>
-            <a:off x="1371600" y="3566160"/>
+            <a:off x="1371600" y="3017520"/>
             <a:ext cx="54864" cy="594360"/>
           </a:xfrm>
           <a:prstGeom prst="rect">
             <a:avLst/>
           </a:prstGeom>
           <a:solidFill>
-            <a:srgbClr val="00D2FF"/>
+            <a:srgbClr val="B8860B"/>
           </a:solidFill>
           <a:ln>
             <a:noFill/>
@@ -6168,13 +6391,13 @@
       </p:sp>
       <p:sp>
         <p:nvSpPr>
-          <p:cNvPr id="9" name="TextBox 8"/>
+          <p:cNvPr id="7" name="TextBox 6"/>
           <p:cNvSpPr txBox="1"/>
           <p:nvPr/>
         </p:nvSpPr>
         <p:spPr>
           <a:xfrm>
-            <a:off x="1737360" y="3566160"/>
+            <a:off x="1737360" y="3017520"/>
             <a:ext cx="2743200" cy="594360"/>
           </a:xfrm>
           <a:prstGeom prst="rect">
@@ -6191,25 +6414,25 @@
             <a:pPr algn="l">
               <a:defRPr sz="2200" b="1">
                 <a:solidFill>
-                  <a:srgbClr val="00D2FF"/>
+                  <a:srgbClr val="B8860B"/>
                 </a:solidFill>
               </a:defRPr>
             </a:pPr>
             <a:r>
-              <a:t>ドメイン知識</a:t>
-            </a:r>
-          </a:p>
-        </p:txBody>
-      </p:sp>
-      <p:sp>
-        <p:nvSpPr>
-          <p:cNvPr id="10" name="TextBox 9"/>
+              <a:t>顧客との信頼関係</a:t>
+            </a:r>
+          </a:p>
+        </p:txBody>
+      </p:sp>
+      <p:sp>
+        <p:nvSpPr>
+          <p:cNvPr id="8" name="TextBox 7"/>
           <p:cNvSpPr txBox="1"/>
           <p:nvPr/>
         </p:nvSpPr>
         <p:spPr>
           <a:xfrm>
-            <a:off x="5029200" y="3566160"/>
+            <a:off x="5029200" y="3017520"/>
             <a:ext cx="6400800" cy="594360"/>
           </a:xfrm>
           <a:prstGeom prst="rect">
@@ -6226,32 +6449,32 @@
             <a:pPr algn="l">
               <a:defRPr sz="2000" b="0">
                 <a:solidFill>
-                  <a:srgbClr val="CCCCCC"/>
+                  <a:srgbClr val="5A5A5A"/>
                 </a:solidFill>
               </a:defRPr>
             </a:pPr>
             <a:r>
-              <a:t>顧客の業界・業務を深く理解し、的確に提案する力</a:t>
-            </a:r>
-          </a:p>
-        </p:txBody>
-      </p:sp>
-      <p:sp>
-        <p:nvSpPr>
-          <p:cNvPr id="11" name="Rectangle 10"/>
+              <a:t>「この人から買いたい」と思われる力</a:t>
+            </a:r>
+          </a:p>
+        </p:txBody>
+      </p:sp>
+      <p:sp>
+        <p:nvSpPr>
+          <p:cNvPr id="9" name="Rectangle 8"/>
           <p:cNvSpPr/>
           <p:nvPr/>
         </p:nvSpPr>
         <p:spPr>
           <a:xfrm>
-            <a:off x="1371600" y="4297680"/>
+            <a:off x="1371600" y="3749039"/>
             <a:ext cx="54864" cy="594360"/>
           </a:xfrm>
           <a:prstGeom prst="rect">
             <a:avLst/>
           </a:prstGeom>
           <a:solidFill>
-            <a:srgbClr val="00D2FF"/>
+            <a:srgbClr val="B8860B"/>
           </a:solidFill>
           <a:ln>
             <a:noFill/>
@@ -6281,13 +6504,13 @@
       </p:sp>
       <p:sp>
         <p:nvSpPr>
-          <p:cNvPr id="12" name="TextBox 11"/>
+          <p:cNvPr id="10" name="TextBox 9"/>
           <p:cNvSpPr txBox="1"/>
           <p:nvPr/>
         </p:nvSpPr>
         <p:spPr>
           <a:xfrm>
-            <a:off x="1737360" y="4297680"/>
+            <a:off x="1737360" y="3749039"/>
             <a:ext cx="2743200" cy="594360"/>
           </a:xfrm>
           <a:prstGeom prst="rect">
@@ -6304,25 +6527,25 @@
             <a:pPr algn="l">
               <a:defRPr sz="2200" b="1">
                 <a:solidFill>
-                  <a:srgbClr val="00D2FF"/>
+                  <a:srgbClr val="B8860B"/>
                 </a:solidFill>
               </a:defRPr>
             </a:pPr>
             <a:r>
-              <a:t>課題発見力</a:t>
-            </a:r>
-          </a:p>
-        </p:txBody>
-      </p:sp>
-      <p:sp>
-        <p:nvSpPr>
-          <p:cNvPr id="13" name="TextBox 12"/>
+              <a:t>ドメイン知識</a:t>
+            </a:r>
+          </a:p>
+        </p:txBody>
+      </p:sp>
+      <p:sp>
+        <p:nvSpPr>
+          <p:cNvPr id="11" name="TextBox 10"/>
           <p:cNvSpPr txBox="1"/>
           <p:nvPr/>
         </p:nvSpPr>
         <p:spPr>
           <a:xfrm>
-            <a:off x="5029200" y="4297680"/>
+            <a:off x="5029200" y="3749039"/>
             <a:ext cx="6400800" cy="594360"/>
           </a:xfrm>
           <a:prstGeom prst="rect">
@@ -6339,32 +6562,32 @@
             <a:pPr algn="l">
               <a:defRPr sz="2000" b="0">
                 <a:solidFill>
-                  <a:srgbClr val="CCCCCC"/>
+                  <a:srgbClr val="5A5A5A"/>
                 </a:solidFill>
               </a:defRPr>
             </a:pPr>
             <a:r>
-              <a:t>顧客自身が気づいていない問題を見つけ、言語化する力</a:t>
-            </a:r>
-          </a:p>
-        </p:txBody>
-      </p:sp>
-      <p:sp>
-        <p:nvSpPr>
-          <p:cNvPr id="14" name="Rectangle 13"/>
+              <a:t>顧客の業界・業務を深く理解し、的確に提案する力</a:t>
+            </a:r>
+          </a:p>
+        </p:txBody>
+      </p:sp>
+      <p:sp>
+        <p:nvSpPr>
+          <p:cNvPr id="12" name="Rectangle 11"/>
           <p:cNvSpPr/>
           <p:nvPr/>
         </p:nvSpPr>
         <p:spPr>
           <a:xfrm>
-            <a:off x="1371600" y="5029200"/>
+            <a:off x="1371600" y="4480559"/>
             <a:ext cx="54864" cy="594360"/>
           </a:xfrm>
           <a:prstGeom prst="rect">
             <a:avLst/>
           </a:prstGeom>
           <a:solidFill>
-            <a:srgbClr val="00D2FF"/>
+            <a:srgbClr val="B8860B"/>
           </a:solidFill>
           <a:ln>
             <a:noFill/>
@@ -6394,13 +6617,13 @@
       </p:sp>
       <p:sp>
         <p:nvSpPr>
-          <p:cNvPr id="15" name="TextBox 14"/>
+          <p:cNvPr id="13" name="TextBox 12"/>
           <p:cNvSpPr txBox="1"/>
           <p:nvPr/>
         </p:nvSpPr>
         <p:spPr>
           <a:xfrm>
-            <a:off x="1737360" y="5029200"/>
+            <a:off x="1737360" y="4480559"/>
             <a:ext cx="2743200" cy="594360"/>
           </a:xfrm>
           <a:prstGeom prst="rect">
@@ -6417,25 +6640,25 @@
             <a:pPr algn="l">
               <a:defRPr sz="2200" b="1">
                 <a:solidFill>
-                  <a:srgbClr val="00D2FF"/>
+                  <a:srgbClr val="B8860B"/>
                 </a:solidFill>
               </a:defRPr>
             </a:pPr>
             <a:r>
-              <a:t>伴走力</a:t>
-            </a:r>
-          </a:p>
-        </p:txBody>
-      </p:sp>
-      <p:sp>
-        <p:nvSpPr>
-          <p:cNvPr id="16" name="TextBox 15"/>
+              <a:t>課題発見力</a:t>
+            </a:r>
+          </a:p>
+        </p:txBody>
+      </p:sp>
+      <p:sp>
+        <p:nvSpPr>
+          <p:cNvPr id="14" name="TextBox 13"/>
           <p:cNvSpPr txBox="1"/>
           <p:nvPr/>
         </p:nvSpPr>
         <p:spPr>
           <a:xfrm>
-            <a:off x="5029200" y="5029200"/>
+            <a:off x="5029200" y="4480559"/>
             <a:ext cx="6400800" cy="594360"/>
           </a:xfrm>
           <a:prstGeom prst="rect">
@@ -6452,32 +6675,32 @@
             <a:pPr algn="l">
               <a:defRPr sz="2000" b="0">
                 <a:solidFill>
-                  <a:srgbClr val="CCCCCC"/>
+                  <a:srgbClr val="5A5A5A"/>
                 </a:solidFill>
               </a:defRPr>
             </a:pPr>
             <a:r>
-              <a:t>導入後も寄り添い、成果が出るまで支援する力</a:t>
-            </a:r>
-          </a:p>
-        </p:txBody>
-      </p:sp>
-      <p:sp>
-        <p:nvSpPr>
-          <p:cNvPr id="17" name="Rectangle 16"/>
+              <a:t>顧客自身が気づいていない問題を見つけ、言語化する力</a:t>
+            </a:r>
+          </a:p>
+        </p:txBody>
+      </p:sp>
+      <p:sp>
+        <p:nvSpPr>
+          <p:cNvPr id="15" name="Rectangle 14"/>
           <p:cNvSpPr/>
           <p:nvPr/>
         </p:nvSpPr>
         <p:spPr>
           <a:xfrm>
-            <a:off x="1371600" y="5760720"/>
+            <a:off x="1371600" y="5212079"/>
             <a:ext cx="54864" cy="594360"/>
           </a:xfrm>
           <a:prstGeom prst="rect">
             <a:avLst/>
           </a:prstGeom>
           <a:solidFill>
-            <a:srgbClr val="00D2FF"/>
+            <a:srgbClr val="B8860B"/>
           </a:solidFill>
           <a:ln>
             <a:noFill/>
@@ -6507,13 +6730,13 @@
       </p:sp>
       <p:sp>
         <p:nvSpPr>
-          <p:cNvPr id="18" name="TextBox 17"/>
+          <p:cNvPr id="16" name="TextBox 15"/>
           <p:cNvSpPr txBox="1"/>
           <p:nvPr/>
         </p:nvSpPr>
         <p:spPr>
           <a:xfrm>
-            <a:off x="1737360" y="5760720"/>
+            <a:off x="1737360" y="5212079"/>
             <a:ext cx="2743200" cy="594360"/>
           </a:xfrm>
           <a:prstGeom prst="rect">
@@ -6530,25 +6753,25 @@
             <a:pPr algn="l">
               <a:defRPr sz="2200" b="1">
                 <a:solidFill>
-                  <a:srgbClr val="00D2FF"/>
+                  <a:srgbClr val="B8860B"/>
                 </a:solidFill>
               </a:defRPr>
             </a:pPr>
             <a:r>
-              <a:t>ブランド</a:t>
-            </a:r>
-          </a:p>
-        </p:txBody>
-      </p:sp>
-      <p:sp>
-        <p:nvSpPr>
-          <p:cNvPr id="19" name="TextBox 18"/>
+              <a:t>伴走力</a:t>
+            </a:r>
+          </a:p>
+        </p:txBody>
+      </p:sp>
+      <p:sp>
+        <p:nvSpPr>
+          <p:cNvPr id="17" name="TextBox 16"/>
           <p:cNvSpPr txBox="1"/>
           <p:nvPr/>
         </p:nvSpPr>
         <p:spPr>
           <a:xfrm>
-            <a:off x="5029200" y="5760720"/>
+            <a:off x="5029200" y="5212079"/>
             <a:ext cx="6400800" cy="594360"/>
           </a:xfrm>
           <a:prstGeom prst="rect">
@@ -6565,7 +6788,120 @@
             <a:pPr algn="l">
               <a:defRPr sz="2000" b="0">
                 <a:solidFill>
-                  <a:srgbClr val="CCCCCC"/>
+                  <a:srgbClr val="5A5A5A"/>
+                </a:solidFill>
+              </a:defRPr>
+            </a:pPr>
+            <a:r>
+              <a:t>導入後も寄り添い、成果が出るまで支援する力</a:t>
+            </a:r>
+          </a:p>
+        </p:txBody>
+      </p:sp>
+      <p:sp>
+        <p:nvSpPr>
+          <p:cNvPr id="18" name="Rectangle 17"/>
+          <p:cNvSpPr/>
+          <p:nvPr/>
+        </p:nvSpPr>
+        <p:spPr>
+          <a:xfrm>
+            <a:off x="1371600" y="5943599"/>
+            <a:ext cx="54864" cy="594360"/>
+          </a:xfrm>
+          <a:prstGeom prst="rect">
+            <a:avLst/>
+          </a:prstGeom>
+          <a:solidFill>
+            <a:srgbClr val="B8860B"/>
+          </a:solidFill>
+          <a:ln>
+            <a:noFill/>
+          </a:ln>
+        </p:spPr>
+        <p:style>
+          <a:lnRef idx="1">
+            <a:schemeClr val="accent1"/>
+          </a:lnRef>
+          <a:fillRef idx="3">
+            <a:schemeClr val="accent1"/>
+          </a:fillRef>
+          <a:effectRef idx="2">
+            <a:schemeClr val="accent1"/>
+          </a:effectRef>
+          <a:fontRef idx="minor">
+            <a:schemeClr val="lt1"/>
+          </a:fontRef>
+        </p:style>
+        <p:txBody>
+          <a:bodyPr rtlCol="0" anchor="ctr"/>
+          <a:lstStyle/>
+          <a:p>
+            <a:pPr algn="ctr"/>
+          </a:p>
+        </p:txBody>
+      </p:sp>
+      <p:sp>
+        <p:nvSpPr>
+          <p:cNvPr id="19" name="TextBox 18"/>
+          <p:cNvSpPr txBox="1"/>
+          <p:nvPr/>
+        </p:nvSpPr>
+        <p:spPr>
+          <a:xfrm>
+            <a:off x="1737360" y="5943599"/>
+            <a:ext cx="2743200" cy="594360"/>
+          </a:xfrm>
+          <a:prstGeom prst="rect">
+            <a:avLst/>
+          </a:prstGeom>
+          <a:noFill/>
+        </p:spPr>
+        <p:txBody>
+          <a:bodyPr wrap="square">
+            <a:spAutoFit/>
+          </a:bodyPr>
+          <a:lstStyle/>
+          <a:p>
+            <a:pPr algn="l">
+              <a:defRPr sz="2200" b="1">
+                <a:solidFill>
+                  <a:srgbClr val="B8860B"/>
+                </a:solidFill>
+              </a:defRPr>
+            </a:pPr>
+            <a:r>
+              <a:t>ブランド</a:t>
+            </a:r>
+          </a:p>
+        </p:txBody>
+      </p:sp>
+      <p:sp>
+        <p:nvSpPr>
+          <p:cNvPr id="20" name="TextBox 19"/>
+          <p:cNvSpPr txBox="1"/>
+          <p:nvPr/>
+        </p:nvSpPr>
+        <p:spPr>
+          <a:xfrm>
+            <a:off x="5029200" y="5943599"/>
+            <a:ext cx="6400800" cy="594360"/>
+          </a:xfrm>
+          <a:prstGeom prst="rect">
+            <a:avLst/>
+          </a:prstGeom>
+          <a:noFill/>
+        </p:spPr>
+        <p:txBody>
+          <a:bodyPr wrap="square">
+            <a:spAutoFit/>
+          </a:bodyPr>
+          <a:lstStyle/>
+          <a:p>
+            <a:pPr algn="l">
+              <a:defRPr sz="2000" b="0">
+                <a:solidFill>
+                  <a:srgbClr val="5A5A5A"/>
                 </a:solidFill>
               </a:defRPr>
             </a:pPr>
@@ -6589,7 +6925,7 @@
     <p:bg>
       <p:bgPr>
         <a:solidFill>
-          <a:srgbClr val="1A1A2E"/>
+          <a:srgbClr val="F5F0E8"/>
         </a:solidFill>
         <a:effectLst/>
       </p:bgPr>
@@ -6616,7 +6952,7 @@
             <a:avLst/>
           </a:prstGeom>
           <a:solidFill>
-            <a:srgbClr val="00D2FF"/>
+            <a:srgbClr val="B8860B"/>
           </a:solidFill>
           <a:ln>
             <a:noFill/>
@@ -6669,7 +7005,7 @@
             <a:pPr algn="l">
               <a:defRPr sz="3600" b="1">
                 <a:solidFill>
-                  <a:srgbClr val="FFFFFF"/>
+                  <a:srgbClr val="3E2C1C"/>
                 </a:solidFill>
               </a:defRPr>
             </a:pPr>
@@ -6681,13 +7017,101 @@
       </p:sp>
       <p:sp>
         <p:nvSpPr>
-          <p:cNvPr id="4" name="TextBox 3"/>
+          <p:cNvPr id="4" name="Rectangle 3"/>
+          <p:cNvSpPr/>
+          <p:nvPr/>
+        </p:nvSpPr>
+        <p:spPr>
+          <a:xfrm>
+            <a:off x="1097280" y="2011680"/>
+            <a:ext cx="5486400" cy="25400"/>
+          </a:xfrm>
+          <a:prstGeom prst="rect">
+            <a:avLst/>
+          </a:prstGeom>
+          <a:solidFill>
+            <a:srgbClr val="B8860B"/>
+          </a:solidFill>
+          <a:ln>
+            <a:noFill/>
+          </a:ln>
+        </p:spPr>
+        <p:style>
+          <a:lnRef idx="1">
+            <a:schemeClr val="accent1"/>
+          </a:lnRef>
+          <a:fillRef idx="3">
+            <a:schemeClr val="accent1"/>
+          </a:fillRef>
+          <a:effectRef idx="2">
+            <a:schemeClr val="accent1"/>
+          </a:effectRef>
+          <a:fontRef idx="minor">
+            <a:schemeClr val="lt1"/>
+          </a:fontRef>
+        </p:style>
+        <p:txBody>
+          <a:bodyPr rtlCol="0" anchor="ctr"/>
+          <a:lstStyle/>
+          <a:p>
+            <a:pPr algn="ctr"/>
+          </a:p>
+        </p:txBody>
+      </p:sp>
+      <p:sp>
+        <p:nvSpPr>
+          <p:cNvPr id="5" name="Rounded Rectangle 4"/>
+          <p:cNvSpPr/>
+          <p:nvPr/>
+        </p:nvSpPr>
+        <p:spPr>
+          <a:xfrm>
+            <a:off x="1097280" y="2560320"/>
+            <a:ext cx="4754880" cy="3474720"/>
+          </a:xfrm>
+          <a:prstGeom prst="roundRect">
+            <a:avLst/>
+          </a:prstGeom>
+          <a:solidFill>
+            <a:srgbClr val="EEE8DD"/>
+          </a:solidFill>
+          <a:ln w="19050">
+            <a:solidFill>
+              <a:srgbClr val="A03C3C"/>
+            </a:solidFill>
+          </a:ln>
+        </p:spPr>
+        <p:style>
+          <a:lnRef idx="1">
+            <a:schemeClr val="accent1"/>
+          </a:lnRef>
+          <a:fillRef idx="3">
+            <a:schemeClr val="accent1"/>
+          </a:fillRef>
+          <a:effectRef idx="2">
+            <a:schemeClr val="accent1"/>
+          </a:effectRef>
+          <a:fontRef idx="minor">
+            <a:schemeClr val="lt1"/>
+          </a:fontRef>
+        </p:style>
+        <p:txBody>
+          <a:bodyPr rtlCol="0" anchor="ctr"/>
+          <a:lstStyle/>
+          <a:p>
+            <a:pPr algn="ctr"/>
+          </a:p>
+        </p:txBody>
+      </p:sp>
+      <p:sp>
+        <p:nvSpPr>
+          <p:cNvPr id="6" name="TextBox 5"/>
           <p:cNvSpPr txBox="1"/>
           <p:nvPr/>
         </p:nvSpPr>
         <p:spPr>
           <a:xfrm>
-            <a:off x="1371600" y="2103120"/>
+            <a:off x="1371600" y="2651760"/>
             <a:ext cx="4114800" cy="457200"/>
           </a:xfrm>
           <a:prstGeom prst="rect">
@@ -6704,7 +7128,7 @@
             <a:pPr algn="l">
               <a:defRPr sz="2400" b="1">
                 <a:solidFill>
-                  <a:srgbClr val="FF6B6B"/>
+                  <a:srgbClr val="A03C3C"/>
                 </a:solidFill>
               </a:defRPr>
             </a:pPr>
@@ -6716,14 +7140,14 @@
       </p:sp>
       <p:sp>
         <p:nvSpPr>
-          <p:cNvPr id="5" name="TextBox 4"/>
+          <p:cNvPr id="7" name="TextBox 6"/>
           <p:cNvSpPr txBox="1"/>
           <p:nvPr/>
         </p:nvSpPr>
         <p:spPr>
           <a:xfrm>
-            <a:off x="1371600" y="2651760"/>
-            <a:ext cx="4572000" cy="2286000"/>
+            <a:off x="1371600" y="3200400"/>
+            <a:ext cx="4389120" cy="2286000"/>
           </a:xfrm>
           <a:prstGeom prst="rect">
             <a:avLst/>
@@ -6739,7 +7163,7 @@
             <a:pPr algn="l">
               <a:defRPr sz="1900" b="0">
                 <a:solidFill>
-                  <a:srgbClr val="FFFFFF"/>
+                  <a:srgbClr val="2C2C2C"/>
                 </a:solidFill>
               </a:defRPr>
             </a:pPr>
@@ -6751,7 +7175,7 @@
               </a:spcBef>
               <a:defRPr sz="1900" b="0">
                 <a:solidFill>
-                  <a:srgbClr val="CCCCCC"/>
+                  <a:srgbClr val="5A5A5A"/>
                 </a:solidFill>
               </a:defRPr>
             </a:pPr>
@@ -6766,12 +7190,16 @@
               </a:spcBef>
               <a:defRPr sz="1900" b="0">
                 <a:solidFill>
-                  <a:srgbClr val="CCCCCC"/>
+                  <a:srgbClr val="5A5A5A"/>
                 </a:solidFill>
               </a:defRPr>
             </a:pPr>
             <a:r>
-              <a:t>×  「技術的に難しいから真似されない」という幻想</a:t>
+              <a:t>×  「技術的に難しいから真似されない」</a:t>
+            </a:r>
+            <a:br/>
+            <a:r>
+              <a:t>という幻想</a:t>
             </a:r>
           </a:p>
           <a:p>
@@ -6781,7 +7209,7 @@
               </a:spcBef>
               <a:defRPr sz="1900" b="0">
                 <a:solidFill>
-                  <a:srgbClr val="CCCCCC"/>
+                  <a:srgbClr val="5A5A5A"/>
                 </a:solidFill>
               </a:defRPr>
             </a:pPr>
@@ -6793,14 +7221,59 @@
       </p:sp>
       <p:sp>
         <p:nvSpPr>
-          <p:cNvPr id="6" name="TextBox 5"/>
+          <p:cNvPr id="8" name="Rounded Rectangle 7"/>
+          <p:cNvSpPr/>
+          <p:nvPr/>
+        </p:nvSpPr>
+        <p:spPr>
+          <a:xfrm>
+            <a:off x="6400800" y="2560320"/>
+            <a:ext cx="5029200" cy="3474720"/>
+          </a:xfrm>
+          <a:prstGeom prst="roundRect">
+            <a:avLst/>
+          </a:prstGeom>
+          <a:solidFill>
+            <a:srgbClr val="EEE8DD"/>
+          </a:solidFill>
+          <a:ln w="19050">
+            <a:solidFill>
+              <a:srgbClr val="B8860B"/>
+            </a:solidFill>
+          </a:ln>
+        </p:spPr>
+        <p:style>
+          <a:lnRef idx="1">
+            <a:schemeClr val="accent1"/>
+          </a:lnRef>
+          <a:fillRef idx="3">
+            <a:schemeClr val="accent1"/>
+          </a:fillRef>
+          <a:effectRef idx="2">
+            <a:schemeClr val="accent1"/>
+          </a:effectRef>
+          <a:fontRef idx="minor">
+            <a:schemeClr val="lt1"/>
+          </a:fontRef>
+        </p:style>
+        <p:txBody>
+          <a:bodyPr rtlCol="0" anchor="ctr"/>
+          <a:lstStyle/>
+          <a:p>
+            <a:pPr algn="ctr"/>
+          </a:p>
+        </p:txBody>
+      </p:sp>
+      <p:sp>
+        <p:nvSpPr>
+          <p:cNvPr id="9" name="TextBox 8"/>
           <p:cNvSpPr txBox="1"/>
           <p:nvPr/>
         </p:nvSpPr>
         <p:spPr>
           <a:xfrm>
-            <a:off x="6400800" y="2103120"/>
-            <a:ext cx="5029200" cy="457200"/>
+            <a:off x="6675120" y="2651760"/>
+            <a:ext cx="4572000" cy="457200"/>
           </a:xfrm>
           <a:prstGeom prst="rect">
             <a:avLst/>
@@ -6816,7 +7289,7 @@
             <a:pPr algn="l">
               <a:defRPr sz="2400" b="1">
                 <a:solidFill>
-                  <a:srgbClr val="00D2FF"/>
+                  <a:srgbClr val="B8860B"/>
                 </a:solidFill>
               </a:defRPr>
             </a:pPr>
@@ -6828,14 +7301,14 @@
       </p:sp>
       <p:sp>
         <p:nvSpPr>
-          <p:cNvPr id="7" name="TextBox 6"/>
+          <p:cNvPr id="10" name="TextBox 9"/>
           <p:cNvSpPr txBox="1"/>
           <p:nvPr/>
         </p:nvSpPr>
         <p:spPr>
           <a:xfrm>
-            <a:off x="6400800" y="2651760"/>
-            <a:ext cx="5029200" cy="3657600"/>
+            <a:off x="6675120" y="3200400"/>
+            <a:ext cx="4572000" cy="3200400"/>
           </a:xfrm>
           <a:prstGeom prst="rect">
             <a:avLst/>
@@ -6851,7 +7324,7 @@
             <a:pPr algn="l">
               <a:defRPr sz="1900" b="0">
                 <a:solidFill>
-                  <a:srgbClr val="FFFFFF"/>
+                  <a:srgbClr val="2C2C2C"/>
                 </a:solidFill>
               </a:defRPr>
             </a:pPr>
@@ -6863,7 +7336,7 @@
               </a:spcBef>
               <a:defRPr sz="1900" b="1">
                 <a:solidFill>
-                  <a:srgbClr val="00D2FF"/>
+                  <a:srgbClr val="B8860B"/>
                 </a:solidFill>
               </a:defRPr>
             </a:pPr>
@@ -6878,7 +7351,7 @@
               </a:spcBef>
               <a:defRPr sz="1700" b="0">
                 <a:solidFill>
-                  <a:srgbClr val="CCCCCC"/>
+                  <a:srgbClr val="5A5A5A"/>
                 </a:solidFill>
               </a:defRPr>
             </a:pPr>
@@ -6893,7 +7366,7 @@
               </a:spcBef>
               <a:defRPr sz="1900" b="1">
                 <a:solidFill>
-                  <a:srgbClr val="00D2FF"/>
+                  <a:srgbClr val="B8860B"/>
                 </a:solidFill>
               </a:defRPr>
             </a:pPr>
@@ -6908,7 +7381,7 @@
               </a:spcBef>
               <a:defRPr sz="1700" b="0">
                 <a:solidFill>
-                  <a:srgbClr val="CCCCCC"/>
+                  <a:srgbClr val="5A5A5A"/>
                 </a:solidFill>
               </a:defRPr>
             </a:pPr>
@@ -6923,7 +7396,7 @@
               </a:spcBef>
               <a:defRPr sz="1900" b="1">
                 <a:solidFill>
-                  <a:srgbClr val="00D2FF"/>
+                  <a:srgbClr val="B8860B"/>
                 </a:solidFill>
               </a:defRPr>
             </a:pPr>
@@ -6938,7 +7411,7 @@
               </a:spcBef>
               <a:defRPr sz="1700" b="0">
                 <a:solidFill>
-                  <a:srgbClr val="CCCCCC"/>
+                  <a:srgbClr val="5A5A5A"/>
                 </a:solidFill>
               </a:defRPr>
             </a:pPr>
@@ -6953,7 +7426,7 @@
               </a:spcBef>
               <a:defRPr sz="1900" b="1">
                 <a:solidFill>
-                  <a:srgbClr val="00D2FF"/>
+                  <a:srgbClr val="B8860B"/>
                 </a:solidFill>
               </a:defRPr>
             </a:pPr>
@@ -6968,7 +7441,7 @@
               </a:spcBef>
               <a:defRPr sz="1700" b="0">
                 <a:solidFill>
-                  <a:srgbClr val="CCCCCC"/>
+                  <a:srgbClr val="5A5A5A"/>
                 </a:solidFill>
               </a:defRPr>
             </a:pPr>
@@ -6992,7 +7465,7 @@
     <p:bg>
       <p:bgPr>
         <a:solidFill>
-          <a:srgbClr val="1A1A2E"/>
+          <a:srgbClr val="F5F0E8"/>
         </a:solidFill>
         <a:effectLst/>
       </p:bgPr>
@@ -7006,14 +7479,57 @@
       <p:grpSpPr/>
       <p:sp>
         <p:nvSpPr>
-          <p:cNvPr id="2" name="TextBox 1"/>
+          <p:cNvPr id="2" name="Rectangle 1"/>
+          <p:cNvSpPr/>
+          <p:nvPr/>
+        </p:nvSpPr>
+        <p:spPr>
+          <a:xfrm>
+            <a:off x="914400" y="1097280"/>
+            <a:ext cx="10362895" cy="25400"/>
+          </a:xfrm>
+          <a:prstGeom prst="rect">
+            <a:avLst/>
+          </a:prstGeom>
+          <a:solidFill>
+            <a:srgbClr val="B8860B"/>
+          </a:solidFill>
+          <a:ln>
+            <a:noFill/>
+          </a:ln>
+        </p:spPr>
+        <p:style>
+          <a:lnRef idx="1">
+            <a:schemeClr val="accent1"/>
+          </a:lnRef>
+          <a:fillRef idx="3">
+            <a:schemeClr val="accent1"/>
+          </a:fillRef>
+          <a:effectRef idx="2">
+            <a:schemeClr val="accent1"/>
+          </a:effectRef>
+          <a:fontRef idx="minor">
+            <a:schemeClr val="lt1"/>
+          </a:fontRef>
+        </p:style>
+        <p:txBody>
+          <a:bodyPr rtlCol="0" anchor="ctr"/>
+          <a:lstStyle/>
+          <a:p>
+            <a:pPr algn="ctr"/>
+          </a:p>
+        </p:txBody>
+      </p:sp>
+      <p:sp>
+        <p:nvSpPr>
+          <p:cNvPr id="3" name="TextBox 2"/>
           <p:cNvSpPr txBox="1"/>
           <p:nvPr/>
         </p:nvSpPr>
         <p:spPr>
           <a:xfrm>
-            <a:off x="914400" y="1371600"/>
-            <a:ext cx="10058400" cy="1097280"/>
+            <a:off x="914400" y="1645920"/>
+            <a:ext cx="10362895" cy="1097280"/>
           </a:xfrm>
           <a:prstGeom prst="rect">
             <a:avLst/>
@@ -7029,7 +7545,7 @@
             <a:pPr algn="ctr">
               <a:defRPr sz="4200" b="1">
                 <a:solidFill>
-                  <a:srgbClr val="00D2FF"/>
+                  <a:srgbClr val="3E2C1C"/>
                 </a:solidFill>
               </a:defRPr>
             </a:pPr>
@@ -7041,13 +7557,13 @@
       </p:sp>
       <p:sp>
         <p:nvSpPr>
-          <p:cNvPr id="3" name="TextBox 2"/>
+          <p:cNvPr id="4" name="TextBox 3"/>
           <p:cNvSpPr txBox="1"/>
           <p:nvPr/>
         </p:nvSpPr>
         <p:spPr>
           <a:xfrm>
-            <a:off x="1828800" y="2926080"/>
+            <a:off x="1828800" y="3200400"/>
             <a:ext cx="8229600" cy="2743200"/>
           </a:xfrm>
           <a:prstGeom prst="rect">
@@ -7064,7 +7580,7 @@
             <a:pPr algn="ctr">
               <a:defRPr sz="2600" b="0">
                 <a:solidFill>
-                  <a:srgbClr val="FFFFFF"/>
+                  <a:srgbClr val="5A5A5A"/>
                 </a:solidFill>
               </a:defRPr>
             </a:pPr>
@@ -7076,7 +7592,7 @@
               </a:spcBef>
               <a:defRPr sz="2600" b="0">
                 <a:solidFill>
-                  <a:srgbClr val="CCCCCC"/>
+                  <a:srgbClr val="5A5A5A"/>
                 </a:solidFill>
               </a:defRPr>
             </a:pPr>
@@ -7091,7 +7607,7 @@
               </a:spcBef>
               <a:defRPr sz="2600" b="0">
                 <a:solidFill>
-                  <a:srgbClr val="CCCCCC"/>
+                  <a:srgbClr val="5A5A5A"/>
                 </a:solidFill>
               </a:defRPr>
             </a:pPr>
@@ -7106,7 +7622,7 @@
               </a:spcBef>
               <a:defRPr sz="1400" b="0">
                 <a:solidFill>
-                  <a:srgbClr val="FFFFFF"/>
+                  <a:srgbClr val="2C2C2C"/>
                 </a:solidFill>
               </a:defRPr>
             </a:pPr>
@@ -7118,7 +7634,7 @@
               </a:spcBef>
               <a:defRPr sz="3000" b="1">
                 <a:solidFill>
-                  <a:srgbClr val="FFFFFF"/>
+                  <a:srgbClr val="3E2C1C"/>
                 </a:solidFill>
               </a:defRPr>
             </a:pPr>
@@ -7133,7 +7649,7 @@
               </a:spcBef>
               <a:defRPr sz="3000" b="1">
                 <a:solidFill>
-                  <a:srgbClr val="FFFFFF"/>
+                  <a:srgbClr val="3E2C1C"/>
                 </a:solidFill>
               </a:defRPr>
             </a:pPr>
@@ -7145,13 +7661,56 @@
       </p:sp>
       <p:sp>
         <p:nvSpPr>
-          <p:cNvPr id="4" name="TextBox 3"/>
+          <p:cNvPr id="5" name="Rectangle 4"/>
+          <p:cNvSpPr/>
+          <p:nvPr/>
+        </p:nvSpPr>
+        <p:spPr>
+          <a:xfrm>
+            <a:off x="914400" y="5486400"/>
+            <a:ext cx="10362895" cy="25400"/>
+          </a:xfrm>
+          <a:prstGeom prst="rect">
+            <a:avLst/>
+          </a:prstGeom>
+          <a:solidFill>
+            <a:srgbClr val="B8860B"/>
+          </a:solidFill>
+          <a:ln>
+            <a:noFill/>
+          </a:ln>
+        </p:spPr>
+        <p:style>
+          <a:lnRef idx="1">
+            <a:schemeClr val="accent1"/>
+          </a:lnRef>
+          <a:fillRef idx="3">
+            <a:schemeClr val="accent1"/>
+          </a:fillRef>
+          <a:effectRef idx="2">
+            <a:schemeClr val="accent1"/>
+          </a:effectRef>
+          <a:fontRef idx="minor">
+            <a:schemeClr val="lt1"/>
+          </a:fontRef>
+        </p:style>
+        <p:txBody>
+          <a:bodyPr rtlCol="0" anchor="ctr"/>
+          <a:lstStyle/>
+          <a:p>
+            <a:pPr algn="ctr"/>
+          </a:p>
+        </p:txBody>
+      </p:sp>
+      <p:sp>
+        <p:nvSpPr>
+          <p:cNvPr id="6" name="TextBox 5"/>
           <p:cNvSpPr txBox="1"/>
           <p:nvPr/>
         </p:nvSpPr>
         <p:spPr>
           <a:xfrm>
-            <a:off x="2743200" y="5669280"/>
+            <a:off x="2743200" y="5760720"/>
             <a:ext cx="6400800" cy="548640"/>
           </a:xfrm>
           <a:prstGeom prst="rect">
@@ -7166,14 +7725,49 @@
           <a:lstStyle/>
           <a:p>
             <a:pPr algn="ctr">
-              <a:defRPr sz="2000" b="0">
-                <a:solidFill>
-                  <a:srgbClr val="CCCCCC"/>
+              <a:defRPr sz="2200" b="1">
+                <a:solidFill>
+                  <a:srgbClr val="B8860B"/>
                 </a:solidFill>
               </a:defRPr>
             </a:pPr>
             <a:r>
               <a:t>HARMONIC insight</a:t>
+            </a:r>
+          </a:p>
+        </p:txBody>
+      </p:sp>
+      <p:sp>
+        <p:nvSpPr>
+          <p:cNvPr id="7" name="TextBox 6"/>
+          <p:cNvSpPr txBox="1"/>
+          <p:nvPr/>
+        </p:nvSpPr>
+        <p:spPr>
+          <a:xfrm>
+            <a:off x="2743200" y="6217920"/>
+            <a:ext cx="6400800" cy="457200"/>
+          </a:xfrm>
+          <a:prstGeom prst="rect">
+            <a:avLst/>
+          </a:prstGeom>
+          <a:noFill/>
+        </p:spPr>
+        <p:txBody>
+          <a:bodyPr wrap="square">
+            <a:spAutoFit/>
+          </a:bodyPr>
+          <a:lstStyle/>
+          <a:p>
+            <a:pPr algn="ctr">
+              <a:defRPr sz="1600" b="0">
+                <a:solidFill>
+                  <a:srgbClr val="5A5A5A"/>
+                </a:solidFill>
+              </a:defRPr>
+            </a:pPr>
+            <a:r>
+              <a:t>AI で業務を、もっと確かに。</a:t>
             </a:r>
           </a:p>
         </p:txBody>
